--- a/docs/report/report_2slides.pptx
+++ b/docs/report/report_2slides.pptx
@@ -3306,7 +3306,7 @@
                 </a:solidFill>
                 <a:latin typeface="Calibri"/>
               </a:rPr>
-              <a:t>Fetching 8 memory frames' stored KV from host DRAM: +46 ms; recomputing them: +283 ms, over the 1 s budget</a:t>
+              <a:t>Bringing 20 memory frames (fixed work ~1,016 ms per chunk): stored KV +18 ms in HBM, +137 ms from host DRAM; recompute +757 ms</a:t>
             </a:r>
           </a:p>
           <a:p>
@@ -3362,7 +3362,7 @@
         <p:spPr>
           <a:xfrm>
             <a:off x="411480" y="2959608"/>
-            <a:ext cx="7165573" cy="2832901"/>
+            <a:ext cx="7165573" cy="2794573"/>
           </a:xfrm>
           <a:prstGeom prst="rect">
             <a:avLst/>
